--- a/dist/초3/과학/힘과소리/초3_과학_힘과소리_02_소리의성질.pptx
+++ b/dist/초3/과학/힘과소리/초3_과학_힘과소리_02_소리의성질.pptx
@@ -123,13 +123,13 @@
   <p:extLst>
     <p:ext uri="{521415D9-36F7-43E2-AB2F-B90AF26B5E84}">
       <p14:sectionLst xmlns:p14="http://schemas.microsoft.com/office/powerpoint/2010/main">
-        <p14:section name="도입" id="{ffa7c206-6b7b-b13b-9a6f-5e2da49d4e66}">
+        <p14:section name="도입" id="{24244c18-b058-f1a7-2dea-9ae3406f1c2a}">
           <p14:sldIdLst>
             <p14:sldId id="256"/>
             <p14:sldId id="257"/>
           </p14:sldIdLst>
         </p14:section>
-        <p14:section name="개념" id="{7645c7e3-901a-8619-150e-cba05ffce4ca}">
+        <p14:section name="개념" id="{cb343b49-38be-2573-328e-9ee4d7d5fe73}">
           <p14:sldIdLst>
             <p14:sldId id="258"/>
             <p14:sldId id="259"/>
@@ -138,7 +138,7 @@
             <p14:sldId id="266"/>
           </p14:sldIdLst>
         </p14:section>
-        <p14:section name="연습" id="{38846a42-f6fe-35e5-af78-ca4ff4bdb630}">
+        <p14:section name="연습" id="{8a8b479e-00f6-7ce3-f861-626c3e3a97b7}">
           <p14:sldIdLst>
             <p14:sldId id="262"/>
             <p14:sldId id="263"/>
@@ -148,24 +148,24 @@
             <p14:sldId id="268"/>
           </p14:sldIdLst>
         </p14:section>
-        <p14:section name="개념" id="{a3f43179-44b1-8112-dbbd-59f0e5f9f292}">
+        <p14:section name="개념" id="{50a5a421-89fa-c053-95d6-ec64eb5503be}">
           <p14:sldIdLst/>
         </p14:section>
-        <p14:section name="연습" id="{ea55f73f-a311-f995-f9ca-d01a7604e67b}">
+        <p14:section name="연습" id="{81890189-3c94-8325-fce6-1920c1ebf09f}">
           <p14:sldIdLst/>
         </p14:section>
-        <p14:section name="확인" id="{571a5367-d53a-c15f-0421-fac626e17da2}">
+        <p14:section name="확인" id="{3c88abba-d31b-65f7-a4a0-9b1b61903043}">
           <p14:sldIdLst>
             <p14:sldId id="269"/>
             <p14:sldId id="270"/>
           </p14:sldIdLst>
         </p14:section>
-        <p14:section name="정리" id="{f63e4fb6-b516-c685-f830-4a5cbd3212d8}">
+        <p14:section name="정리" id="{180f36d8-9599-1308-4565-7e1ab9e16e31}">
           <p14:sldIdLst>
             <p14:sldId id="271"/>
           </p14:sldIdLst>
         </p14:section>
-        <p14:section name="보충" id="{963db9c2-e61c-0eea-51a1-7f3d50da4035}">
+        <p14:section name="보충" id="{b46c2a69-b1e2-7ddf-84f4-646a10fb2994}">
           <p14:sldIdLst>
             <p14:sldId id="272"/>
           </p14:sldIdLst>
@@ -6228,18 +6228,18 @@
           </p:nvPr>
         </p:nvGraphicFramePr>
         <p:xfrm>
-          <a:off x="1522476" y="2362200"/>
-          <a:ext cx="9144000" cy="914400"/>
+          <a:off x="1293876" y="2188210"/>
+          <a:ext cx="9601200" cy="914400"/>
         </p:xfrm>
         <a:graphic>
           <a:graphicData uri="http://schemas.openxmlformats.org/drawingml/2006/table">
             <a:tbl>
               <a:tblPr/>
               <a:tblGrid>
-                <a:gridCol w="5029200"/>
-                <a:gridCol w="4114800"/>
+                <a:gridCol w="5280660"/>
+                <a:gridCol w="4320540"/>
               </a:tblGrid>
-              <a:tr h="481584">
+              <a:tr h="551180">
                 <a:tc>
                   <a:txBody>
                     <a:bodyPr/>
@@ -6249,7 +6249,7 @@
                         <a:buNone/>
                       </a:pPr>
                       <a:r>
-                        <a:rPr lang="en-US" sz="2400" b="1" dirty="0">
+                        <a:rPr lang="en-US" sz="2800" b="1" dirty="0">
                           <a:solidFill>
                             <a:srgbClr val="1F2937"/>
                           </a:solidFill>
@@ -6259,7 +6259,7 @@
                         </a:rPr>
                         <a:t>해 본 것</a:t>
                       </a:r>
-                      <a:endParaRPr lang="en-US" sz="2400" dirty="0">
+                      <a:endParaRPr lang="en-US" sz="2800" dirty="0">
                         <a:latin typeface="맑은 고딕" charset="0"/>
                         <a:ea typeface="맑은 고딕" charset="0"/>
                         <a:cs typeface="맑은 고딕" charset="0"/>
@@ -6317,7 +6317,7 @@
                         <a:buNone/>
                       </a:pPr>
                       <a:r>
-                        <a:rPr lang="en-US" sz="2400" b="1" dirty="0">
+                        <a:rPr lang="en-US" sz="2800" b="1" dirty="0">
                           <a:solidFill>
                             <a:srgbClr val="1F2937"/>
                           </a:solidFill>
@@ -6327,7 +6327,7 @@
                         </a:rPr>
                         <a:t>결과</a:t>
                       </a:r>
-                      <a:endParaRPr lang="en-US" sz="2400" dirty="0">
+                      <a:endParaRPr lang="en-US" sz="2800" dirty="0">
                         <a:latin typeface="맑은 고딕" charset="0"/>
                         <a:ea typeface="맑은 고딕" charset="0"/>
                         <a:cs typeface="맑은 고딕" charset="0"/>
@@ -6377,7 +6377,7 @@
                   </a:tcPr>
                 </a:tc>
               </a:tr>
-              <a:tr h="481584">
+              <a:tr h="551180">
                 <a:tc>
                   <a:txBody>
                     <a:bodyPr/>
@@ -6387,7 +6387,7 @@
                         <a:buNone/>
                       </a:pPr>
                       <a:r>
-                        <a:rPr lang="en-US" sz="2400" dirty="0">
+                        <a:rPr lang="en-US" sz="2800" dirty="0">
                           <a:solidFill>
                             <a:srgbClr val="1F2937"/>
                           </a:solidFill>
@@ -6397,7 +6397,7 @@
                         </a:rPr>
                         <a:t>① 실을 팽팽하게</a:t>
                       </a:r>
-                      <a:endParaRPr lang="en-US" sz="2400" dirty="0">
+                      <a:endParaRPr lang="en-US" sz="2800" dirty="0">
                         <a:latin typeface="맑은 고딕" charset="0"/>
                         <a:ea typeface="맑은 고딕" charset="0"/>
                         <a:cs typeface="맑은 고딕" charset="0"/>
@@ -6455,7 +6455,7 @@
                         <a:buNone/>
                       </a:pPr>
                       <a:r>
-                        <a:rPr lang="en-US" sz="2400" dirty="0">
+                        <a:rPr lang="en-US" sz="2800" dirty="0">
                           <a:solidFill>
                             <a:srgbClr val="1F2937"/>
                           </a:solidFill>
@@ -6465,7 +6465,7 @@
                         </a:rPr>
                         <a:t>잘 들려요</a:t>
                       </a:r>
-                      <a:endParaRPr lang="en-US" sz="2400" dirty="0">
+                      <a:endParaRPr lang="en-US" sz="2800" dirty="0">
                         <a:latin typeface="맑은 고딕" charset="0"/>
                         <a:ea typeface="맑은 고딕" charset="0"/>
                         <a:cs typeface="맑은 고딕" charset="0"/>
@@ -6515,7 +6515,7 @@
                   </a:tcPr>
                 </a:tc>
               </a:tr>
-              <a:tr h="481584">
+              <a:tr h="551180">
                 <a:tc>
                   <a:txBody>
                     <a:bodyPr/>
@@ -6525,7 +6525,7 @@
                         <a:buNone/>
                       </a:pPr>
                       <a:r>
-                        <a:rPr lang="en-US" sz="2400" dirty="0">
+                        <a:rPr lang="en-US" sz="2800" dirty="0">
                           <a:solidFill>
                             <a:srgbClr val="1F2937"/>
                           </a:solidFill>
@@ -6535,7 +6535,7 @@
                         </a:rPr>
                         <a:t>② 실을 느슨하게</a:t>
                       </a:r>
-                      <a:endParaRPr lang="en-US" sz="2400" dirty="0">
+                      <a:endParaRPr lang="en-US" sz="2800" dirty="0">
                         <a:latin typeface="맑은 고딕" charset="0"/>
                         <a:ea typeface="맑은 고딕" charset="0"/>
                         <a:cs typeface="맑은 고딕" charset="0"/>
@@ -6593,7 +6593,7 @@
                         <a:buNone/>
                       </a:pPr>
                       <a:r>
-                        <a:rPr lang="en-US" sz="2400" dirty="0">
+                        <a:rPr lang="en-US" sz="2800" dirty="0">
                           <a:solidFill>
                             <a:srgbClr val="1F2937"/>
                           </a:solidFill>
@@ -6603,7 +6603,7 @@
                         </a:rPr>
                         <a:t>잘 안 들려요</a:t>
                       </a:r>
-                      <a:endParaRPr lang="en-US" sz="2400" dirty="0">
+                      <a:endParaRPr lang="en-US" sz="2800" dirty="0">
                         <a:latin typeface="맑은 고딕" charset="0"/>
                         <a:ea typeface="맑은 고딕" charset="0"/>
                         <a:cs typeface="맑은 고딕" charset="0"/>
@@ -6653,7 +6653,7 @@
                   </a:tcPr>
                 </a:tc>
               </a:tr>
-              <a:tr h="481584">
+              <a:tr h="551180">
                 <a:tc>
                   <a:txBody>
                     <a:bodyPr/>
@@ -6663,7 +6663,7 @@
                         <a:buNone/>
                       </a:pPr>
                       <a:r>
-                        <a:rPr lang="en-US" sz="2400" dirty="0">
+                        <a:rPr lang="en-US" sz="2800" dirty="0">
                           <a:solidFill>
                             <a:srgbClr val="1F2937"/>
                           </a:solidFill>
@@ -6673,7 +6673,7 @@
                         </a:rPr>
                         <a:t>③ 실 가운데를 잡음</a:t>
                       </a:r>
-                      <a:endParaRPr lang="en-US" sz="2400" dirty="0">
+                      <a:endParaRPr lang="en-US" sz="2800" dirty="0">
                         <a:latin typeface="맑은 고딕" charset="0"/>
                         <a:ea typeface="맑은 고딕" charset="0"/>
                         <a:cs typeface="맑은 고딕" charset="0"/>
@@ -6731,7 +6731,7 @@
                         <a:buNone/>
                       </a:pPr>
                       <a:r>
-                        <a:rPr lang="en-US" sz="2400" dirty="0">
+                        <a:rPr lang="en-US" sz="2800" dirty="0">
                           <a:solidFill>
                             <a:srgbClr val="1F2937"/>
                           </a:solidFill>
@@ -6741,7 +6741,7 @@
                         </a:rPr>
                         <a:t>거의 안 들려요</a:t>
                       </a:r>
-                      <a:endParaRPr lang="en-US" sz="2400" dirty="0">
+                      <a:endParaRPr lang="en-US" sz="2800" dirty="0">
                         <a:latin typeface="맑은 고딕" charset="0"/>
                         <a:ea typeface="맑은 고딕" charset="0"/>
                         <a:cs typeface="맑은 고딕" charset="0"/>
@@ -6791,7 +6791,7 @@
                   </a:tcPr>
                 </a:tc>
               </a:tr>
-              <a:tr h="481584">
+              <a:tr h="551180">
                 <a:tc>
                   <a:txBody>
                     <a:bodyPr/>
@@ -6801,7 +6801,7 @@
                         <a:buNone/>
                       </a:pPr>
                       <a:r>
-                        <a:rPr lang="en-US" sz="2400" dirty="0">
+                        <a:rPr lang="en-US" sz="2800" dirty="0">
                           <a:solidFill>
                             <a:srgbClr val="1F2937"/>
                           </a:solidFill>
@@ -6811,7 +6811,7 @@
                         </a:rPr>
                         <a:t>④ 책상에 귀 대기</a:t>
                       </a:r>
-                      <a:endParaRPr lang="en-US" sz="2400" dirty="0">
+                      <a:endParaRPr lang="en-US" sz="2800" dirty="0">
                         <a:latin typeface="맑은 고딕" charset="0"/>
                         <a:ea typeface="맑은 고딕" charset="0"/>
                         <a:cs typeface="맑은 고딕" charset="0"/>
@@ -6869,7 +6869,7 @@
                         <a:buNone/>
                       </a:pPr>
                       <a:r>
-                        <a:rPr lang="en-US" sz="2400" dirty="0">
+                        <a:rPr lang="en-US" sz="2800" dirty="0">
                           <a:solidFill>
                             <a:srgbClr val="1F2937"/>
                           </a:solidFill>
@@ -6879,7 +6879,7 @@
                         </a:rPr>
                         <a:t>똑똑 잘 들려요</a:t>
                       </a:r>
-                      <a:endParaRPr lang="en-US" sz="2400" dirty="0">
+                      <a:endParaRPr lang="en-US" sz="2800" dirty="0">
                         <a:latin typeface="맑은 고딕" charset="0"/>
                         <a:ea typeface="맑은 고딕" charset="0"/>
                         <a:cs typeface="맑은 고딕" charset="0"/>
@@ -12746,18 +12746,18 @@
           </p:nvPr>
         </p:nvGraphicFramePr>
         <p:xfrm>
-          <a:off x="1065276" y="2314956"/>
-          <a:ext cx="10058400" cy="914400"/>
+          <a:off x="836676" y="2183384"/>
+          <a:ext cx="10515600" cy="914400"/>
         </p:xfrm>
         <a:graphic>
           <a:graphicData uri="http://schemas.openxmlformats.org/drawingml/2006/table">
             <a:tbl>
               <a:tblPr/>
               <a:tblGrid>
-                <a:gridCol w="4526280"/>
-                <a:gridCol w="5532120"/>
+                <a:gridCol w="4732020"/>
+                <a:gridCol w="5783580"/>
               </a:tblGrid>
-              <a:tr h="481584">
+              <a:tr h="551180">
                 <a:tc>
                   <a:txBody>
                     <a:bodyPr/>
@@ -12767,7 +12767,7 @@
                         <a:buNone/>
                       </a:pPr>
                       <a:r>
-                        <a:rPr lang="en-US" sz="2400" b="1" dirty="0">
+                        <a:rPr lang="en-US" sz="2800" b="1" dirty="0">
                           <a:solidFill>
                             <a:srgbClr val="1F2937"/>
                           </a:solidFill>
@@ -12777,7 +12777,7 @@
                         </a:rPr>
                         <a:t>바꾼 것</a:t>
                       </a:r>
-                      <a:endParaRPr lang="en-US" sz="2400" dirty="0">
+                      <a:endParaRPr lang="en-US" sz="2800" dirty="0">
                         <a:latin typeface="맑은 고딕" charset="0"/>
                         <a:ea typeface="맑은 고딕" charset="0"/>
                         <a:cs typeface="맑은 고딕" charset="0"/>
@@ -12835,7 +12835,7 @@
                         <a:buNone/>
                       </a:pPr>
                       <a:r>
-                        <a:rPr lang="en-US" sz="2400" b="1" dirty="0">
+                        <a:rPr lang="en-US" sz="2800" b="1" dirty="0">
                           <a:solidFill>
                             <a:srgbClr val="1F2937"/>
                           </a:solidFill>
@@ -12845,7 +12845,7 @@
                         </a:rPr>
                         <a:t>결과</a:t>
                       </a:r>
-                      <a:endParaRPr lang="en-US" sz="2400" dirty="0">
+                      <a:endParaRPr lang="en-US" sz="2800" dirty="0">
                         <a:latin typeface="맑은 고딕" charset="0"/>
                         <a:ea typeface="맑은 고딕" charset="0"/>
                         <a:cs typeface="맑은 고딕" charset="0"/>
@@ -12895,7 +12895,7 @@
                   </a:tcPr>
                 </a:tc>
               </a:tr>
-              <a:tr h="853440">
+              <a:tr h="977392">
                 <a:tc>
                   <a:txBody>
                     <a:bodyPr/>
@@ -12905,7 +12905,7 @@
                         <a:buNone/>
                       </a:pPr>
                       <a:r>
-                        <a:rPr lang="en-US" sz="2400" dirty="0">
+                        <a:rPr lang="en-US" sz="2800" dirty="0">
                           <a:solidFill>
                             <a:srgbClr val="1F2937"/>
                           </a:solidFill>
@@ -12915,7 +12915,7 @@
                         </a:rPr>
                         <a:t>살짝 → 세게 튕기기</a:t>
                       </a:r>
-                      <a:endParaRPr lang="en-US" sz="2400" dirty="0">
+                      <a:endParaRPr lang="en-US" sz="2800" dirty="0">
                         <a:latin typeface="맑은 고딕" charset="0"/>
                         <a:ea typeface="맑은 고딕" charset="0"/>
                         <a:cs typeface="맑은 고딕" charset="0"/>
@@ -12973,7 +12973,7 @@
                         <a:buNone/>
                       </a:pPr>
                       <a:r>
-                        <a:rPr lang="en-US" sz="2400" dirty="0">
+                        <a:rPr lang="en-US" sz="2800" dirty="0">
                           <a:solidFill>
                             <a:srgbClr val="1F2937"/>
                           </a:solidFill>
@@ -12983,7 +12983,7 @@
                         </a:rPr>
                         <a:t>작은 소리 → 큰 소리</a:t>
                       </a:r>
-                      <a:endParaRPr lang="en-US" sz="2400" dirty="0">
+                      <a:endParaRPr lang="en-US" sz="2800" dirty="0">
                         <a:latin typeface="맑은 고딕" charset="0"/>
                         <a:ea typeface="맑은 고딕" charset="0"/>
                         <a:cs typeface="맑은 고딕" charset="0"/>
@@ -12994,7 +12994,7 @@
                         <a:buNone/>
                       </a:pPr>
                       <a:r>
-                        <a:rPr lang="en-US" sz="2400" dirty="0">
+                        <a:rPr lang="en-US" sz="2800" dirty="0">
                           <a:solidFill>
                             <a:srgbClr val="1F2937"/>
                           </a:solidFill>
@@ -13004,7 +13004,7 @@
                         </a:rPr>
                         <a:t>(자가 더 크게 떨려요)</a:t>
                       </a:r>
-                      <a:endParaRPr lang="en-US" sz="2400" dirty="0">
+                      <a:endParaRPr lang="en-US" sz="2800" dirty="0">
                         <a:latin typeface="맑은 고딕" charset="0"/>
                         <a:ea typeface="맑은 고딕" charset="0"/>
                         <a:cs typeface="맑은 고딕" charset="0"/>
@@ -13054,7 +13054,7 @@
                   </a:tcPr>
                 </a:tc>
               </a:tr>
-              <a:tr h="481584">
+              <a:tr h="551180">
                 <a:tc>
                   <a:txBody>
                     <a:bodyPr/>
@@ -13064,7 +13064,7 @@
                         <a:buNone/>
                       </a:pPr>
                       <a:r>
-                        <a:rPr lang="en-US" sz="2400" dirty="0">
+                        <a:rPr lang="en-US" sz="2800" dirty="0">
                           <a:solidFill>
                             <a:srgbClr val="1F2937"/>
                           </a:solidFill>
@@ -13074,7 +13074,7 @@
                         </a:rPr>
                         <a:t>나온 길이 20 cm → 10 cm</a:t>
                       </a:r>
-                      <a:endParaRPr lang="en-US" sz="2400" dirty="0">
+                      <a:endParaRPr lang="en-US" sz="2800" dirty="0">
                         <a:latin typeface="맑은 고딕" charset="0"/>
                         <a:ea typeface="맑은 고딕" charset="0"/>
                         <a:cs typeface="맑은 고딕" charset="0"/>
@@ -13132,7 +13132,7 @@
                         <a:buNone/>
                       </a:pPr>
                       <a:r>
-                        <a:rPr lang="en-US" sz="2400" dirty="0">
+                        <a:rPr lang="en-US" sz="2800" dirty="0">
                           <a:solidFill>
                             <a:srgbClr val="1F2937"/>
                           </a:solidFill>
@@ -13142,7 +13142,7 @@
                         </a:rPr>
                         <a:t>낮은 소리 → 높은 소리</a:t>
                       </a:r>
-                      <a:endParaRPr lang="en-US" sz="2400" dirty="0">
+                      <a:endParaRPr lang="en-US" sz="2800" dirty="0">
                         <a:latin typeface="맑은 고딕" charset="0"/>
                         <a:ea typeface="맑은 고딕" charset="0"/>
                         <a:cs typeface="맑은 고딕" charset="0"/>

--- a/dist/초3/과학/힘과소리/초3_과학_힘과소리_02_소리의성질.pptx
+++ b/dist/초3/과학/힘과소리/초3_과학_힘과소리_02_소리의성질.pptx
@@ -123,13 +123,13 @@
   <p:extLst>
     <p:ext uri="{521415D9-36F7-43E2-AB2F-B90AF26B5E84}">
       <p14:sectionLst xmlns:p14="http://schemas.microsoft.com/office/powerpoint/2010/main">
-        <p14:section name="도입" id="{24244c18-b058-f1a7-2dea-9ae3406f1c2a}">
+        <p14:section name="도입" id="{2369f9ac-c3f1-0590-5b0a-1da397e41b68}">
           <p14:sldIdLst>
             <p14:sldId id="256"/>
             <p14:sldId id="257"/>
           </p14:sldIdLst>
         </p14:section>
-        <p14:section name="개념" id="{cb343b49-38be-2573-328e-9ee4d7d5fe73}">
+        <p14:section name="개념" id="{9c913efe-5382-c188-b634-b8cb4cdb0a6a}">
           <p14:sldIdLst>
             <p14:sldId id="258"/>
             <p14:sldId id="259"/>
@@ -138,7 +138,7 @@
             <p14:sldId id="266"/>
           </p14:sldIdLst>
         </p14:section>
-        <p14:section name="연습" id="{8a8b479e-00f6-7ce3-f861-626c3e3a97b7}">
+        <p14:section name="연습" id="{6c8447ef-27d9-87a1-58d7-81ef2ca38747}">
           <p14:sldIdLst>
             <p14:sldId id="262"/>
             <p14:sldId id="263"/>
@@ -148,24 +148,24 @@
             <p14:sldId id="268"/>
           </p14:sldIdLst>
         </p14:section>
-        <p14:section name="개념" id="{50a5a421-89fa-c053-95d6-ec64eb5503be}">
+        <p14:section name="개념" id="{5ac62a7a-e13e-3647-cf82-9b40f968d8f9}">
           <p14:sldIdLst/>
         </p14:section>
-        <p14:section name="연습" id="{81890189-3c94-8325-fce6-1920c1ebf09f}">
+        <p14:section name="연습" id="{1f15eee1-da73-dc8f-61a0-deca884b7aa0}">
           <p14:sldIdLst/>
         </p14:section>
-        <p14:section name="확인" id="{3c88abba-d31b-65f7-a4a0-9b1b61903043}">
+        <p14:section name="확인" id="{15e569da-a8d0-4928-1d3c-4324b11120cf}">
           <p14:sldIdLst>
             <p14:sldId id="269"/>
             <p14:sldId id="270"/>
           </p14:sldIdLst>
         </p14:section>
-        <p14:section name="정리" id="{180f36d8-9599-1308-4565-7e1ab9e16e31}">
+        <p14:section name="정리" id="{0cbb9f53-840a-5b31-8f95-80294b298f42}">
           <p14:sldIdLst>
             <p14:sldId id="271"/>
           </p14:sldIdLst>
         </p14:section>
-        <p14:section name="보충" id="{b46c2a69-b1e2-7ddf-84f4-646a10fb2994}">
+        <p14:section name="보충" id="{5b9fe75a-8aad-5317-0907-51582704e9b4}">
           <p14:sldIdLst>
             <p14:sldId id="272"/>
           </p14:sldIdLst>
@@ -582,6 +582,8 @@
 - “오늘은 자와 고무줄로 소리를 내 보고, 종이컵 전화기도 만들어 볼 거야.”
 예상 답
 - “입에서 나와요.” “공기로 와요.” “잘 모르겠어요.”
+막히면
+- 질문을 어려워하면 손뼉을 쳐 보이고 “이 소리는 어디에서 났을까?”라고 묻습니다.
 주의
 - 종이컵 전화기는 수업 전에 부모가 만들어 두면 시간이 절약됩니다: 종이컵 바닥 가운데에 이쑤시개로 작은 구멍을 뚫고, 실(약 3 m)을 컵 바깥에서 안쪽으로 꿰어 클립에 묶습니다. 다른 컵도 같은 방법으로 잇습니다.
 - 아이의 생각을 고치지 말고 들어 둡니다. 실험으로 확인합니다.</a:t>

--- a/dist/초3/과학/힘과소리/초3_과학_힘과소리_02_소리의성질.pptx
+++ b/dist/초3/과학/힘과소리/초3_과학_힘과소리_02_소리의성질.pptx
@@ -123,13 +123,13 @@
   <p:extLst>
     <p:ext uri="{521415D9-36F7-43E2-AB2F-B90AF26B5E84}">
       <p14:sectionLst xmlns:p14="http://schemas.microsoft.com/office/powerpoint/2010/main">
-        <p14:section name="도입" id="{2369f9ac-c3f1-0590-5b0a-1da397e41b68}">
+        <p14:section name="도입" id="{746eae81-34d2-1bb0-81ea-d253ca68e907}">
           <p14:sldIdLst>
             <p14:sldId id="256"/>
             <p14:sldId id="257"/>
           </p14:sldIdLst>
         </p14:section>
-        <p14:section name="개념" id="{9c913efe-5382-c188-b634-b8cb4cdb0a6a}">
+        <p14:section name="개념" id="{91c6d5ed-2603-165a-f9df-ee41a02c61e2}">
           <p14:sldIdLst>
             <p14:sldId id="258"/>
             <p14:sldId id="259"/>
@@ -138,7 +138,7 @@
             <p14:sldId id="266"/>
           </p14:sldIdLst>
         </p14:section>
-        <p14:section name="연습" id="{6c8447ef-27d9-87a1-58d7-81ef2ca38747}">
+        <p14:section name="연습" id="{9a87404c-fe7b-f073-ac1f-52222c38e255}">
           <p14:sldIdLst>
             <p14:sldId id="262"/>
             <p14:sldId id="263"/>
@@ -148,24 +148,24 @@
             <p14:sldId id="268"/>
           </p14:sldIdLst>
         </p14:section>
-        <p14:section name="개념" id="{5ac62a7a-e13e-3647-cf82-9b40f968d8f9}">
+        <p14:section name="개념" id="{4cf0ec32-5a59-4f66-ecfc-4620941d010b}">
           <p14:sldIdLst/>
         </p14:section>
-        <p14:section name="연습" id="{1f15eee1-da73-dc8f-61a0-deca884b7aa0}">
+        <p14:section name="연습" id="{435d84f7-a977-57c7-be9e-e724fdfaf68f}">
           <p14:sldIdLst/>
         </p14:section>
-        <p14:section name="확인" id="{15e569da-a8d0-4928-1d3c-4324b11120cf}">
+        <p14:section name="확인" id="{4fa86053-c899-9930-bad1-e32e5a935e72}">
           <p14:sldIdLst>
             <p14:sldId id="269"/>
             <p14:sldId id="270"/>
           </p14:sldIdLst>
         </p14:section>
-        <p14:section name="정리" id="{0cbb9f53-840a-5b31-8f95-80294b298f42}">
+        <p14:section name="정리" id="{03e461c7-cb58-dedd-2547-a81c03a825fb}">
           <p14:sldIdLst>
             <p14:sldId id="271"/>
           </p14:sldIdLst>
         </p14:section>
-        <p14:section name="보충" id="{5b9fe75a-8aad-5317-0907-51582704e9b4}">
+        <p14:section name="보충" id="{be036000-3fc5-5ff8-7bd8-f12d75d1fb91}">
           <p14:sldIdLst>
             <p14:sldId id="272"/>
           </p14:sldIdLst>
